--- a/decks/geog-glaciers/geog-glaciers_ch2_glacier-ice.pptx
+++ b/decks/geog-glaciers/geog-glaciers_ch2_glacier-ice.pptx
@@ -125,30 +125,30 @@
   <p:extLst>
     <p:ext uri="{521415D9-36F7-43E2-AB2F-B90AF26B5E84}">
       <p14:sectionLst xmlns:p14="http://schemas.microsoft.com/office/powerpoint/2010/main">
-        <p14:section name="Opening" id="{a323540e-4419-31f6-e66e-7fed66c31f9a}">
+        <p14:section name="Opening" id="{ec2386c8-7d5f-332d-2b12-4ded6a42a627}">
           <p14:sldIdLst>
             <p14:sldId id="256"/>
           </p14:sldIdLst>
         </p14:section>
-        <p14:section name="Gate" id="{9df1ef13-f7a3-febc-7f77-c7917d3f5995}">
+        <p14:section name="Gate" id="{569908da-5427-3fd9-58b3-79d89d7e9441}">
           <p14:sldIdLst>
             <p14:sldId id="257"/>
             <p14:sldId id="258"/>
           </p14:sldIdLst>
         </p14:section>
-        <p14:section name="Pre-teach" id="{5cdd0ef9-1187-41d2-97f1-7c81b12cd1cf}">
+        <p14:section name="Pre-teach" id="{046959fb-07c6-5c94-2f75-b4b42b88a3f6}">
           <p14:sldIdLst>
             <p14:sldId id="259"/>
             <p14:sldId id="260"/>
           </p14:sldIdLst>
         </p14:section>
-        <p14:section name="Read-along" id="{f26c9943-fffc-5931-11c1-7080bbaf2c60}">
+        <p14:section name="Read-along" id="{d70b5e2e-e5a6-cfcb-68cb-b3fde0c39a95}">
           <p14:sldIdLst>
             <p14:sldId id="261"/>
             <p14:sldId id="262"/>
           </p14:sldIdLst>
         </p14:section>
-        <p14:section name="Teach" id="{f50fd3c0-9df0-0179-c67b-62cc73e7307a}">
+        <p14:section name="Teach" id="{18ad2116-6e7c-6088-2bd4-64f7561154ea}">
           <p14:sldIdLst>
             <p14:sldId id="263"/>
             <p14:sldId id="264"/>
@@ -156,7 +156,7 @@
             <p14:sldId id="266"/>
           </p14:sldIdLst>
         </p14:section>
-        <p14:section name="Routes" id="{fe267faf-be3c-c9ac-b01d-ec9d567ecc41}">
+        <p14:section name="Routes" id="{14e6358d-fb8b-d483-2c56-4e8ca691f210}">
           <p14:sldIdLst>
             <p14:sldId id="267"/>
             <p14:sldId id="268"/>
@@ -164,12 +164,12 @@
             <p14:sldId id="270"/>
           </p14:sldIdLst>
         </p14:section>
-        <p14:section name="Close" id="{43097a52-2edc-406c-d466-0b1cefdcee11}">
+        <p14:section name="Close" id="{41a7f6bd-a3ad-4c7f-d8b2-c2cfaeb4e65b}">
           <p14:sldIdLst>
             <p14:sldId id="271"/>
           </p14:sldIdLst>
         </p14:section>
-        <p14:section name="Answers" id="{97c30333-0b0b-65f3-af0f-e06b8e1a82ef}">
+        <p14:section name="Answers" id="{f0929f44-5fc1-758b-d809-e89d28e4271e}">
           <p14:sldIdLst>
             <p14:sldId id="272"/>
             <p14:sldId id="273"/>
